--- a/docs/Financial-Aid-AgentCore-Customer.pptx
+++ b/docs/Financial-Aid-AgentCore-Customer.pptx
@@ -2424,7 +2424,7 @@
                 <a:ea typeface="Calibri" pitchFamily="34" charset="-122"/>
                 <a:cs typeface="Calibri" pitchFamily="34" charset="-120"/>
               </a:rPr>
-              <a:t>Walk your financial-aid, privacy, and security teams through the architecture and the live 21-check proof.</a:t>
+              <a:t>Walk your financial-aid, privacy, and security teams through the architecture and the live 31-check proof.</a:t>
             </a:r>
             <a:endParaRPr lang="en-US" sz="1230" dirty="0"/>
           </a:p>
@@ -8946,7 +8946,7 @@
                 <a:ea typeface="Cambria" pitchFamily="34" charset="-122"/>
                 <a:cs typeface="Cambria" pitchFamily="34" charset="-120"/>
               </a:rPr>
-              <a:t>21/21</a:t>
+              <a:t>31/31</a:t>
             </a:r>
             <a:endParaRPr lang="en-US" sz="3000" dirty="0"/>
           </a:p>

--- a/docs/Financial-Aid-AgentCore-Customer.pptx
+++ b/docs/Financial-Aid-AgentCore-Customer.pptx
@@ -2424,7 +2424,7 @@
                 <a:ea typeface="Calibri" pitchFamily="34" charset="-122"/>
                 <a:cs typeface="Calibri" pitchFamily="34" charset="-120"/>
               </a:rPr>
-              <a:t>Walk your financial-aid, privacy, and security teams through the architecture and the live 31-check proof.</a:t>
+              <a:t>Walk your financial-aid, privacy, and security teams through the architecture and the live 32-check proof.</a:t>
             </a:r>
             <a:endParaRPr lang="en-US" sz="1230" dirty="0"/>
           </a:p>
@@ -8946,7 +8946,7 @@
                 <a:ea typeface="Cambria" pitchFamily="34" charset="-122"/>
                 <a:cs typeface="Cambria" pitchFamily="34" charset="-120"/>
               </a:rPr>
-              <a:t>31/31</a:t>
+              <a:t>32/32</a:t>
             </a:r>
             <a:endParaRPr lang="en-US" sz="3000" dirty="0"/>
           </a:p>

--- a/docs/Financial-Aid-AgentCore-Customer.pptx
+++ b/docs/Financial-Aid-AgentCore-Customer.pptx
@@ -2424,7 +2424,7 @@
                 <a:ea typeface="Calibri" pitchFamily="34" charset="-122"/>
                 <a:cs typeface="Calibri" pitchFamily="34" charset="-120"/>
               </a:rPr>
-              <a:t>Walk your financial-aid, privacy, and security teams through the architecture and the live 32-check proof.</a:t>
+              <a:t>Walk your financial-aid, privacy, and security teams through the architecture and the captured live validation evidence.</a:t>
             </a:r>
             <a:endParaRPr lang="en-US" sz="1230" dirty="0"/>
           </a:p>
@@ -8946,7 +8946,7 @@
                 <a:ea typeface="Cambria" pitchFamily="34" charset="-122"/>
                 <a:cs typeface="Cambria" pitchFamily="34" charset="-120"/>
               </a:rPr>
-              <a:t>32/32</a:t>
+              <a:t>137/137</a:t>
             </a:r>
             <a:endParaRPr lang="en-US" sz="3000" dirty="0"/>
           </a:p>
@@ -8988,7 +8988,7 @@
                 <a:ea typeface="Calibri" pitchFamily="34" charset="-122"/>
                 <a:cs typeface="Calibri" pitchFamily="34" charset="-120"/>
               </a:rPr>
-              <a:t>governance checks pass, live</a:t>
+              <a:t>automated tests green in CI</a:t>
             </a:r>
             <a:endParaRPr lang="en-US" sz="1150" dirty="0"/>
           </a:p>
@@ -9061,7 +9061,7 @@
                 <a:ea typeface="Cambria" pitchFamily="34" charset="-122"/>
                 <a:cs typeface="Cambria" pitchFamily="34" charset="-120"/>
               </a:rPr>
-              <a:t>Pell+SAP</a:t>
+              <a:t>End-to-end</a:t>
             </a:r>
             <a:endParaRPr lang="en-US" sz="3000" dirty="0"/>
           </a:p>
@@ -9103,7 +9103,7 @@
                 <a:ea typeface="Calibri" pitchFamily="34" charset="-122"/>
                 <a:cs typeface="Calibri" pitchFamily="34" charset="-120"/>
               </a:rPr>
-              <a:t>computed deterministically</a:t>
+              <a:t>proven live - inside a locked-down private network</a:t>
             </a:r>
             <a:endParaRPr lang="en-US" sz="1150" dirty="0"/>
           </a:p>
@@ -9218,7 +9218,7 @@
                 <a:ea typeface="Calibri" pitchFamily="34" charset="-122"/>
                 <a:cs typeface="Calibri" pitchFamily="34" charset="-120"/>
               </a:rPr>
-              <a:t>of awards gated by an aid officer</a:t>
+              <a:t>of determinations gated by an aid officer</a:t>
             </a:r>
             <a:endParaRPr lang="en-US" sz="1150" dirty="0"/>
           </a:p>

--- a/docs/Financial-Aid-AgentCore-Customer.pptx
+++ b/docs/Financial-Aid-AgentCore-Customer.pptx
@@ -8946,7 +8946,7 @@
                 <a:ea typeface="Cambria" pitchFamily="34" charset="-122"/>
                 <a:cs typeface="Cambria" pitchFamily="34" charset="-120"/>
               </a:rPr>
-              <a:t>137/137</a:t>
+              <a:t>150/150</a:t>
             </a:r>
             <a:endParaRPr lang="en-US" sz="3000" dirty="0"/>
           </a:p>

--- a/docs/Financial-Aid-AgentCore-Customer.pptx
+++ b/docs/Financial-Aid-AgentCore-Customer.pptx
@@ -8946,7 +8946,7 @@
                 <a:ea typeface="Cambria" pitchFamily="34" charset="-122"/>
                 <a:cs typeface="Cambria" pitchFamily="34" charset="-120"/>
               </a:rPr>
-              <a:t>150/150</a:t>
+              <a:t>175/175</a:t>
             </a:r>
             <a:endParaRPr lang="en-US" sz="3000" dirty="0"/>
           </a:p>

--- a/docs/Financial-Aid-AgentCore-Customer.pptx
+++ b/docs/Financial-Aid-AgentCore-Customer.pptx
@@ -8946,7 +8946,7 @@
                 <a:ea typeface="Cambria" pitchFamily="34" charset="-122"/>
                 <a:cs typeface="Cambria" pitchFamily="34" charset="-120"/>
               </a:rPr>
-              <a:t>175/175</a:t>
+              <a:t>337/337</a:t>
             </a:r>
             <a:endParaRPr lang="en-US" sz="3000" dirty="0"/>
           </a:p>
